--- a/brand/templates/brand-slides-template.pptx
+++ b/brand/templates/brand-slides-template.pptx
@@ -1269,7 +1269,7 @@
                 <a:ea typeface="Jost" pitchFamily="34" charset="-122"/>
                 <a:cs typeface="Jost" pitchFamily="34" charset="-120"/>
               </a:rPr>
-              <a:t>BRAND · v0.1</a:t>
+              <a:t>BRAND · v0.2</a:t>
             </a:r>
             <a:endParaRPr lang="en-US" sz="900" dirty="0"/>
           </a:p>
@@ -1424,7 +1424,7 @@
                 <a:ea typeface="Jost" pitchFamily="34" charset="-122"/>
                 <a:cs typeface="Jost" pitchFamily="34" charset="-120"/>
               </a:rPr>
-              <a:t>BRAND · v0.1</a:t>
+              <a:t>BRAND · v0.2</a:t>
             </a:r>
             <a:endParaRPr lang="en-US" sz="900" dirty="0"/>
           </a:p>
@@ -1579,7 +1579,7 @@
                 <a:ea typeface="Jost" pitchFamily="34" charset="-122"/>
                 <a:cs typeface="Jost" pitchFamily="34" charset="-120"/>
               </a:rPr>
-              <a:t>BRAND · v0.1</a:t>
+              <a:t>BRAND · v0.2</a:t>
             </a:r>
             <a:endParaRPr lang="en-US" sz="900" dirty="0"/>
           </a:p>
@@ -2373,7 +2373,7 @@
             <a:r>
               <a:rPr lang="en-US" sz="1100" spc="300" kern="0" dirty="0">
                 <a:solidFill>
-                  <a:srgbClr val="E4572E"/>
+                  <a:srgbClr val="C4421D"/>
                 </a:solidFill>
                 <a:latin typeface="Jost" pitchFamily="34" charset="0"/>
                 <a:ea typeface="Jost" pitchFamily="34" charset="-122"/>
@@ -3777,8 +3777,8 @@
         </p:nvSpPr>
         <p:spPr>
           <a:xfrm>
-            <a:off x="5852160" y="1417320"/>
-            <a:ext cx="502920" cy="502920"/>
+            <a:off x="5852160" y="1325880"/>
+            <a:ext cx="457200" cy="457200"/>
           </a:xfrm>
           <a:prstGeom prst="rect">
             <a:avLst/>
@@ -3802,7 +3802,7 @@
         </p:nvSpPr>
         <p:spPr>
           <a:xfrm>
-            <a:off x="6492240" y="1536192"/>
+            <a:off x="6446520" y="1417320"/>
             <a:ext cx="2103120" cy="274320"/>
           </a:xfrm>
           <a:prstGeom prst="rect">
@@ -3841,8 +3841,8 @@
         </p:nvSpPr>
         <p:spPr>
           <a:xfrm>
-            <a:off x="5852160" y="2103120"/>
-            <a:ext cx="502920" cy="502920"/>
+            <a:off x="5852160" y="1947672"/>
+            <a:ext cx="457200" cy="457200"/>
           </a:xfrm>
           <a:prstGeom prst="rect">
             <a:avLst/>
@@ -3866,7 +3866,7 @@
         </p:nvSpPr>
         <p:spPr>
           <a:xfrm>
-            <a:off x="6492240" y="2221992"/>
+            <a:off x="6446520" y="2039112"/>
             <a:ext cx="2103120" cy="274320"/>
           </a:xfrm>
           <a:prstGeom prst="rect">
@@ -3891,7 +3891,7 @@
                 <a:ea typeface="Jost" pitchFamily="34" charset="-122"/>
                 <a:cs typeface="Jost" pitchFamily="34" charset="-120"/>
               </a:rPr>
-              <a:t>accent*  #E4572E</a:t>
+              <a:t>accent  #E4572E</a:t>
             </a:r>
             <a:endParaRPr lang="en-US" sz="1200" dirty="0"/>
           </a:p>
@@ -3905,8 +3905,72 @@
         </p:nvSpPr>
         <p:spPr>
           <a:xfrm>
-            <a:off x="5852160" y="2788920"/>
-            <a:ext cx="502920" cy="502920"/>
+            <a:off x="5852160" y="2569464"/>
+            <a:ext cx="457200" cy="457200"/>
+          </a:xfrm>
+          <a:prstGeom prst="rect">
+            <a:avLst/>
+          </a:prstGeom>
+          <a:solidFill>
+            <a:srgbClr val="C4421D"/>
+          </a:solidFill>
+          <a:ln w="9525">
+            <a:solidFill>
+              <a:srgbClr val="E3E3E3"/>
+            </a:solidFill>
+            <a:prstDash val="solid"/>
+          </a:ln>
+        </p:spPr>
+      </p:sp>
+      <p:sp>
+        <p:nvSpPr>
+          <p:cNvPr id="12" name="Text 10"/>
+          <p:cNvSpPr txBox="1"/>
+          <p:nvPr/>
+        </p:nvSpPr>
+        <p:spPr>
+          <a:xfrm>
+            <a:off x="6446520" y="2660904"/>
+            <a:ext cx="2103120" cy="274320"/>
+          </a:xfrm>
+          <a:prstGeom prst="rect">
+            <a:avLst/>
+          </a:prstGeom>
+          <a:noFill/>
+          <a:ln/>
+        </p:spPr>
+        <p:txBody>
+          <a:bodyPr wrap="square" lIns="0" tIns="0" rIns="0" bIns="0" rtlCol="0" anchor="t"/>
+          <a:lstStyle/>
+          <a:p>
+            <a:pPr indent="0" marL="0">
+              <a:buNone/>
+            </a:pPr>
+            <a:r>
+              <a:rPr lang="en-US" sz="1200" dirty="0">
+                <a:solidFill>
+                  <a:srgbClr val="1A1A1A"/>
+                </a:solidFill>
+                <a:latin typeface="Jost" pitchFamily="34" charset="0"/>
+                <a:ea typeface="Jost" pitchFamily="34" charset="-122"/>
+                <a:cs typeface="Jost" pitchFamily="34" charset="-120"/>
+              </a:rPr>
+              <a:t>accent text  #C4421D</a:t>
+            </a:r>
+            <a:endParaRPr lang="en-US" sz="1200" dirty="0"/>
+          </a:p>
+        </p:txBody>
+      </p:sp>
+      <p:sp>
+        <p:nvSpPr>
+          <p:cNvPr id="13" name="Shape 11"/>
+          <p:cNvSpPr/>
+          <p:nvPr/>
+        </p:nvSpPr>
+        <p:spPr>
+          <a:xfrm>
+            <a:off x="5852160" y="3191256"/>
+            <a:ext cx="457200" cy="457200"/>
           </a:xfrm>
           <a:prstGeom prst="rect">
             <a:avLst/>
@@ -3924,13 +3988,13 @@
       </p:sp>
       <p:sp>
         <p:nvSpPr>
-          <p:cNvPr id="12" name="Text 10"/>
+          <p:cNvPr id="14" name="Text 12"/>
           <p:cNvSpPr txBox="1"/>
           <p:nvPr/>
         </p:nvSpPr>
         <p:spPr>
           <a:xfrm>
-            <a:off x="6492240" y="2907792"/>
+            <a:off x="6446520" y="3282696"/>
             <a:ext cx="2103120" cy="274320"/>
           </a:xfrm>
           <a:prstGeom prst="rect">
@@ -3963,14 +4027,14 @@
       </p:sp>
       <p:sp>
         <p:nvSpPr>
-          <p:cNvPr id="13" name="Shape 11"/>
+          <p:cNvPr id="15" name="Shape 13"/>
           <p:cNvSpPr/>
           <p:nvPr/>
         </p:nvSpPr>
         <p:spPr>
           <a:xfrm>
-            <a:off x="5852160" y="3474720"/>
-            <a:ext cx="502920" cy="502920"/>
+            <a:off x="5852160" y="3813048"/>
+            <a:ext cx="457200" cy="457200"/>
           </a:xfrm>
           <a:prstGeom prst="rect">
             <a:avLst/>
@@ -3988,13 +4052,13 @@
       </p:sp>
       <p:sp>
         <p:nvSpPr>
-          <p:cNvPr id="14" name="Text 12"/>
+          <p:cNvPr id="16" name="Text 14"/>
           <p:cNvSpPr txBox="1"/>
           <p:nvPr/>
         </p:nvSpPr>
         <p:spPr>
           <a:xfrm>
-            <a:off x="6492240" y="3593592"/>
+            <a:off x="6446520" y="3904488"/>
             <a:ext cx="2103120" cy="274320"/>
           </a:xfrm>
           <a:prstGeom prst="rect">
@@ -4027,46 +4091,7 @@
       </p:sp>
       <p:sp>
         <p:nvSpPr>
-          <p:cNvPr id="15" name="Text 13"/>
-          <p:cNvSpPr txBox="1"/>
-          <p:nvPr/>
-        </p:nvSpPr>
-        <p:spPr>
-          <a:xfrm>
-            <a:off x="6492240" y="4206240"/>
-            <a:ext cx="2103120" cy="274320"/>
-          </a:xfrm>
-          <a:prstGeom prst="rect">
-            <a:avLst/>
-          </a:prstGeom>
-          <a:noFill/>
-          <a:ln/>
-        </p:spPr>
-        <p:txBody>
-          <a:bodyPr wrap="square" lIns="0" tIns="0" rIns="0" bIns="0" rtlCol="0" anchor="t"/>
-          <a:lstStyle/>
-          <a:p>
-            <a:pPr indent="0" marL="0">
-              <a:buNone/>
-            </a:pPr>
-            <a:r>
-              <a:rPr lang="en-US" sz="1000" dirty="0">
-                <a:solidFill>
-                  <a:srgbClr val="6B6B6B"/>
-                </a:solidFill>
-                <a:latin typeface="Nunito Sans" pitchFamily="34" charset="0"/>
-                <a:ea typeface="Nunito Sans" pitchFamily="34" charset="-122"/>
-                <a:cs typeface="Nunito Sans" pitchFamily="34" charset="-120"/>
-              </a:rPr>
-              <a:t>* provisional</a:t>
-            </a:r>
-            <a:endParaRPr lang="en-US" sz="1000" dirty="0"/>
-          </a:p>
-        </p:txBody>
-      </p:sp>
-      <p:sp>
-        <p:nvSpPr>
-          <p:cNvPr id="16" name="Text 0"/>
+          <p:cNvPr id="17" name="Text 0"/>
           <p:cNvSpPr/>
           <p:nvPr>
             <p:ph idx="101" type="body" hasCustomPrompt="1"/>

--- a/brand/templates/brand-slides-template.pptx
+++ b/brand/templates/brand-slides-template.pptx
@@ -12,9 +12,10 @@
     <p:sldId id="260" r:id="rId6"/>
     <p:sldId id="261" r:id="rId7"/>
     <p:sldId id="262" r:id="rId8"/>
+    <p:sldId id="263" r:id="rId9"/>
   </p:sldIdLst>
   <p:notesMasterIdLst>
-    <p:notesMasterId r:id="rId9"/>
+    <p:notesMasterId r:id="rId10"/>
   </p:notesMasterIdLst>
   <p:sldSz cx="9144000" cy="5143500"/>
   <p:notesSz cx="5143500" cy="9144000"/>
@@ -111,6 +112,319 @@
     </a:lvl9pPr>
   </p:defaultTextStyle>
 </p:presentation>
+</file>
+
+<file path=ppt/charts/chart1.xml><?xml version="1.0" encoding="utf-8"?>
+<c:chartSpace xmlns:c="http://schemas.openxmlformats.org/drawingml/2006/chart" xmlns:a="http://schemas.openxmlformats.org/drawingml/2006/main" xmlns:r="http://schemas.openxmlformats.org/officeDocument/2006/relationships">
+  <c:date1904 val="0"/>
+  <c:roundedCorners val="1"/>
+  <c:chart>
+    <c:autoTitleDeleted val="1"/>
+    <c:plotArea>
+      <c:layout/>
+      <c:barChart>
+        <c:barDir val="col"/>
+        <c:grouping val="clustered"/>
+        <c:varyColors val="0"/>
+        <c:ser>
+          <c:idx val="0"/>
+          <c:order val="0"/>
+          <c:tx>
+            <c:strRef>
+              <c:f>Sheet1!$B$1</c:f>
+              <c:strCache>
+                <c:ptCount val="1"/>
+                <c:pt idx="0">
+                  <c:v>Revenue (k€)</c:v>
+                </c:pt>
+              </c:strCache>
+            </c:strRef>
+          </c:tx>
+          <c:spPr>
+            <a:solidFill>
+              <a:srgbClr val="BDBDBD"/>
+            </a:solidFill>
+            <a:effectLst/>
+          </c:spPr>
+          <c:invertIfNegative val="0"/>
+          <c:dLbls>
+            <c:numFmt formatCode="#,##0" sourceLinked="0"/>
+            <c:txPr>
+              <a:bodyPr/>
+              <a:lstStyle/>
+              <a:p>
+                <a:pPr>
+                  <a:defRPr b="0" i="0" strike="noStrike" sz="1100" u="none">
+                    <a:solidFill>
+                      <a:srgbClr val="1A1A1A"/>
+                    </a:solidFill>
+                    <a:latin typeface="Nunito Sans"/>
+                  </a:defRPr>
+                </a:pPr>
+              </a:p>
+            </c:txPr>
+            <c:showLegendKey val="0"/>
+            <c:showVal val="1"/>
+            <c:showCatName val="0"/>
+            <c:showSerName val="0"/>
+            <c:showPercent val="0"/>
+            <c:showBubbleSize val="0"/>
+            <c:showLeaderLines val="0"/>
+          </c:dLbls>
+          <c:dPt>
+            <c:idx val="0"/>
+            <c:invertIfNegative val="0"/>
+            <c:bubble3D val="0"/>
+            <c:spPr>
+              <a:solidFill>
+                <a:srgbClr val="BDBDBD"/>
+              </a:solidFill>
+              <a:effectLst/>
+            </c:spPr>
+          </c:dPt>
+          <c:dPt>
+            <c:idx val="1"/>
+            <c:invertIfNegative val="0"/>
+            <c:bubble3D val="0"/>
+            <c:spPr>
+              <a:solidFill>
+                <a:srgbClr val="BDBDBD"/>
+              </a:solidFill>
+              <a:effectLst/>
+            </c:spPr>
+          </c:dPt>
+          <c:dPt>
+            <c:idx val="2"/>
+            <c:invertIfNegative val="0"/>
+            <c:bubble3D val="0"/>
+            <c:spPr>
+              <a:solidFill>
+                <a:srgbClr val="BDBDBD"/>
+              </a:solidFill>
+              <a:effectLst/>
+            </c:spPr>
+          </c:dPt>
+          <c:dPt>
+            <c:idx val="3"/>
+            <c:invertIfNegative val="0"/>
+            <c:bubble3D val="0"/>
+            <c:spPr>
+              <a:solidFill>
+                <a:srgbClr val="BDBDBD"/>
+              </a:solidFill>
+              <a:effectLst/>
+            </c:spPr>
+          </c:dPt>
+          <c:dPt>
+            <c:idx val="4"/>
+            <c:invertIfNegative val="0"/>
+            <c:bubble3D val="0"/>
+            <c:spPr>
+              <a:solidFill>
+                <a:srgbClr val="E4572E"/>
+              </a:solidFill>
+              <a:effectLst/>
+            </c:spPr>
+          </c:dPt>
+          <c:dPt>
+            <c:idx val="5"/>
+            <c:invertIfNegative val="0"/>
+            <c:bubble3D val="0"/>
+            <c:spPr>
+              <a:solidFill>
+                <a:srgbClr val="BDBDBD"/>
+              </a:solidFill>
+              <a:effectLst/>
+            </c:spPr>
+          </c:dPt>
+          <c:cat>
+            <c:multiLvlStrRef>
+              <c:f>Sheet1!$A$2:$A$7</c:f>
+              <c:multiLvlStrCache>
+                <c:ptCount val="6"/>
+                <c:lvl>
+                  <c:pt idx="0">
+                    <c:v>Q1</c:v>
+                  </c:pt>
+                  <c:pt idx="1">
+                    <c:v>Q2</c:v>
+                  </c:pt>
+                  <c:pt idx="2">
+                    <c:v>Q3</c:v>
+                  </c:pt>
+                  <c:pt idx="3">
+                    <c:v>Q4</c:v>
+                  </c:pt>
+                  <c:pt idx="4">
+                    <c:v>Q5</c:v>
+                  </c:pt>
+                  <c:pt idx="5">
+                    <c:v>Q6</c:v>
+                  </c:pt>
+                </c:lvl>
+              </c:multiLvlStrCache>
+            </c:multiLvlStrRef>
+          </c:cat>
+          <c:val>
+            <c:numRef>
+              <c:f>Sheet1!$B$2:$B$7</c:f>
+              <c:numCache>
+                <c:formatCode>General</c:formatCode>
+                <c:ptCount val="6"/>
+                <c:pt idx="0">
+                  <c:v>42</c:v>
+                </c:pt>
+                <c:pt idx="1">
+                  <c:v>48</c:v>
+                </c:pt>
+                <c:pt idx="2">
+                  <c:v>45</c:v>
+                </c:pt>
+                <c:pt idx="3">
+                  <c:v>51</c:v>
+                </c:pt>
+                <c:pt idx="4">
+                  <c:v>68</c:v>
+                </c:pt>
+                <c:pt idx="5">
+                  <c:v>55</c:v>
+                </c:pt>
+              </c:numCache>
+            </c:numRef>
+          </c:val>
+        </c:ser>
+        <c:dLbls>
+          <c:numFmt formatCode="#,##0" sourceLinked="0"/>
+          <c:txPr>
+            <a:bodyPr/>
+            <a:lstStyle/>
+            <a:p>
+              <a:pPr>
+                <a:defRPr b="0" i="0" strike="noStrike" sz="1100" u="none">
+                  <a:solidFill>
+                    <a:srgbClr val="1A1A1A"/>
+                  </a:solidFill>
+                  <a:latin typeface="Nunito Sans"/>
+                </a:defRPr>
+              </a:pPr>
+            </a:p>
+          </c:txPr>
+          <c:showLegendKey val="0"/>
+          <c:showVal val="1"/>
+          <c:showCatName val="0"/>
+          <c:showSerName val="0"/>
+          <c:showPercent val="0"/>
+          <c:showBubbleSize val="0"/>
+          <c:showLeaderLines val="0"/>
+        </c:dLbls>
+        <c:gapWidth val="60"/>
+        <c:overlap val="0"/>
+        <c:axId val="2094734554"/>
+        <c:axId val="2094734552"/>
+        <c:axId val="2094734556"/>
+      </c:barChart>
+      <c:catAx>
+        <c:axId val="2094734554"/>
+        <c:scaling>
+          <c:orientation val="minMax"/>
+        </c:scaling>
+        <c:delete val="0"/>
+        <c:axPos val="b"/>
+        <c:numFmt formatCode="General" sourceLinked="1"/>
+        <c:majorTickMark val="out"/>
+        <c:minorTickMark val="none"/>
+        <c:tickLblPos val="low"/>
+        <c:spPr>
+          <a:ln w="12700" cap="flat">
+            <a:solidFill>
+              <a:srgbClr val="BDBDBD"/>
+            </a:solidFill>
+            <a:prstDash val="solid"/>
+            <a:round/>
+          </a:ln>
+        </c:spPr>
+        <c:txPr>
+          <a:bodyPr/>
+          <a:lstStyle/>
+          <a:p>
+            <a:pPr>
+              <a:defRPr sz="1100" b="0" i="0" u="none" strike="noStrike">
+                <a:solidFill>
+                  <a:srgbClr val="6B6B6B"/>
+                </a:solidFill>
+                <a:latin typeface="Nunito Sans"/>
+              </a:defRPr>
+            </a:pPr>
+            <a:endParaRPr lang="en-US"/>
+          </a:p>
+        </c:txPr>
+        <c:crossAx val="2094734552"/>
+        <c:crosses val="autoZero"/>
+        <c:auto val="1"/>
+        <c:lblAlgn val="ctr"/>
+        <c:noMultiLvlLbl val="1"/>
+      </c:catAx>
+      <c:valAx>
+        <c:axId val="2094734552"/>
+        <c:scaling>
+          <c:orientation val="minMax"/>
+        </c:scaling>
+        <c:delete val="1"/>
+        <c:axPos val="l"/>
+        <c:numFmt formatCode="General" sourceLinked="0"/>
+        <c:majorTickMark val="out"/>
+        <c:minorTickMark val="none"/>
+        <c:tickLblPos val="nextTo"/>
+        <c:spPr>
+          <a:ln w="12700" cap="flat">
+            <a:solidFill>
+              <a:srgbClr val="888888"/>
+            </a:solidFill>
+            <a:prstDash val="solid"/>
+            <a:round/>
+          </a:ln>
+        </c:spPr>
+        <c:txPr>
+          <a:bodyPr/>
+          <a:lstStyle/>
+          <a:p>
+            <a:pPr>
+              <a:defRPr sz="1200" b="0" i="0" u="none" strike="noStrike">
+                <a:solidFill>
+                  <a:srgbClr val="000000"/>
+                </a:solidFill>
+                <a:latin typeface="Arial"/>
+              </a:defRPr>
+            </a:pPr>
+            <a:endParaRPr lang="en-US"/>
+          </a:p>
+        </c:txPr>
+        <c:crossAx val="2094734554"/>
+        <c:crosses val="autoZero"/>
+        <c:crossBetween val="between"/>
+      </c:valAx>
+      <c:spPr>
+        <a:noFill/>
+        <a:ln>
+          <a:noFill/>
+        </a:ln>
+        <a:effectLst/>
+      </c:spPr>
+    </c:plotArea>
+    <c:plotVisOnly val="1"/>
+    <c:dispBlanksAs val="span"/>
+  </c:chart>
+  <c:spPr>
+    <a:noFill/>
+    <a:ln>
+      <a:noFill/>
+    </a:ln>
+    <a:effectLst/>
+  </c:spPr>
+  <c:externalData r:id="rId1">
+    <c:autoUpdate val="0"/>
+  </c:externalData>
+</c:chartSpace>
 </file>
 
 <file path=ppt/notesMasters/notesMaster1.xml><?xml version="1.0" encoding="utf-8"?>
@@ -1078,6 +1392,94 @@
 </p:notes>
 </file>
 
+<file path=ppt/notesSlides/notesSlide8.xml><?xml version="1.0" encoding="utf-8"?>
+<p:notes xmlns:a="http://schemas.openxmlformats.org/drawingml/2006/main" xmlns:r="http://schemas.openxmlformats.org/officeDocument/2006/relationships" xmlns:p="http://schemas.openxmlformats.org/presentationml/2006/main">
+  <p:cSld>
+    <p:spTree>
+      <p:nvGrpSpPr>
+        <p:cNvPr id="1" name=""/>
+        <p:cNvGrpSpPr/>
+        <p:nvPr/>
+      </p:nvGrpSpPr>
+      <p:grpSpPr>
+        <a:xfrm>
+          <a:off x="0" y="0"/>
+          <a:ext cx="0" cy="0"/>
+          <a:chOff x="0" y="0"/>
+          <a:chExt cx="0" cy="0"/>
+        </a:xfrm>
+      </p:grpSpPr>
+      <p:sp>
+        <p:nvSpPr>
+          <p:cNvPr id="2" name="Slide Image Placeholder 1"/>
+          <p:cNvSpPr>
+            <a:spLocks noGrp="1" noRot="1" noChangeAspect="1"/>
+          </p:cNvSpPr>
+          <p:nvPr>
+            <p:ph type="sldImg"/>
+          </p:nvPr>
+        </p:nvSpPr>
+        <p:spPr/>
+      </p:sp>
+      <p:sp>
+        <p:nvSpPr>
+          <p:cNvPr id="3" name="Notes Placeholder 2"/>
+          <p:cNvSpPr>
+            <a:spLocks noGrp="1"/>
+          </p:cNvSpPr>
+          <p:nvPr>
+            <p:ph type="body" idx="1"/>
+          </p:nvPr>
+        </p:nvSpPr>
+        <p:spPr/>
+        <p:txBody>
+          <a:bodyPr/>
+          <a:lstStyle/>
+          <a:p>
+            <a:r>
+              <a:rPr lang="en-US" dirty="0"/>
+              <a:t/>
+            </a:r>
+            <a:endParaRPr lang="en-US" dirty="0"/>
+          </a:p>
+        </p:txBody>
+      </p:sp>
+      <p:sp>
+        <p:nvSpPr>
+          <p:cNvPr id="4" name="Slide Number Placeholder 3"/>
+          <p:cNvSpPr>
+            <a:spLocks noGrp="1"/>
+          </p:cNvSpPr>
+          <p:nvPr>
+            <p:ph type="sldNum" sz="quarter" idx="10"/>
+          </p:nvPr>
+        </p:nvSpPr>
+        <p:spPr/>
+        <p:txBody>
+          <a:bodyPr/>
+          <a:lstStyle/>
+          <a:p>
+            <a:fld id="{F7021451-1387-4CA6-816F-3879F97B5CBC}" type="slidenum">
+              <a:rPr lang="en-US"/>
+              <a:t>8</a:t>
+            </a:fld>
+            <a:endParaRPr lang="en-US"/>
+          </a:p>
+        </p:txBody>
+      </p:sp>
+    </p:spTree>
+    <p:extLst>
+      <p:ext uri="{BB962C8B-B14F-4D97-AF65-F5344CB8AC3E}">
+        <p14:creationId xmlns:p14="http://schemas.microsoft.com/office/powerpoint/2010/main" val="1024086991"/>
+      </p:ext>
+    </p:extLst>
+  </p:cSld>
+  <p:clrMapOvr>
+    <a:masterClrMapping/>
+  </p:clrMapOvr>
+</p:notes>
+</file>
+
 <file path=ppt/slideLayouts/slideLayout1.xml><?xml version="1.0" encoding="utf-8"?>
 <p:sldLayout xmlns:a="http://schemas.openxmlformats.org/drawingml/2006/main" xmlns:r="http://schemas.openxmlformats.org/officeDocument/2006/relationships" xmlns:p="http://schemas.openxmlformats.org/presentationml/2006/main" preserve="1">
   <p:cSld name="DEFAULT">
@@ -1269,7 +1671,7 @@
                 <a:ea typeface="Jost" pitchFamily="34" charset="-122"/>
                 <a:cs typeface="Jost" pitchFamily="34" charset="-120"/>
               </a:rPr>
-              <a:t>BRAND · v0.2</a:t>
+              <a:t>BRAND · v0.3</a:t>
             </a:r>
             <a:endParaRPr lang="en-US" sz="900" dirty="0"/>
           </a:p>
@@ -1424,7 +1826,7 @@
                 <a:ea typeface="Jost" pitchFamily="34" charset="-122"/>
                 <a:cs typeface="Jost" pitchFamily="34" charset="-120"/>
               </a:rPr>
-              <a:t>BRAND · v0.2</a:t>
+              <a:t>BRAND · v0.3</a:t>
             </a:r>
             <a:endParaRPr lang="en-US" sz="900" dirty="0"/>
           </a:p>
@@ -1579,7 +1981,7 @@
                 <a:ea typeface="Jost" pitchFamily="34" charset="-122"/>
                 <a:cs typeface="Jost" pitchFamily="34" charset="-120"/>
               </a:rPr>
-              <a:t>BRAND · v0.2</a:t>
+              <a:t>BRAND · v0.3</a:t>
             </a:r>
             <a:endParaRPr lang="en-US" sz="900" dirty="0"/>
           </a:p>
@@ -3607,22 +4009,38 @@
                 <a:ea typeface="Jost" pitchFamily="34" charset="-122"/>
                 <a:cs typeface="Jost" pitchFamily="34" charset="-120"/>
               </a:rPr>
-              <a:t>Type &amp; colour reference</a:t>
+              <a:t>Charts: grey plus one accent tells the story</a:t>
             </a:r>
             <a:endParaRPr lang="en-US" sz="2800" dirty="0"/>
           </a:p>
         </p:txBody>
       </p:sp>
-      <p:sp>
-        <p:nvSpPr>
-          <p:cNvPr id="3" name="Text 1"/>
+      <p:graphicFrame>
+        <p:nvGraphicFramePr>
+          <p:cNvPr id="3" name="Chart 0" descr=""/>
+          <p:cNvGraphicFramePr/>
+          <p:nvPr/>
+        </p:nvGraphicFramePr>
+        <p:xfrm>
+          <a:off x="548640" y="1325880"/>
+          <a:ext cx="5120640" cy="3108960"/>
+        </p:xfrm>
+        <a:graphic xmlns:a="http://schemas.openxmlformats.org/drawingml/2006/main">
+          <a:graphicData uri="http://schemas.openxmlformats.org/drawingml/2006/chart">
+            <c:chart xmlns:c="http://schemas.openxmlformats.org/drawingml/2006/chart" r:id="rId1"/>
+          </a:graphicData>
+        </a:graphic>
+      </p:graphicFrame>
+      <p:sp>
+        <p:nvSpPr>
+          <p:cNvPr id="4" name="Text 1"/>
           <p:cNvSpPr txBox="1"/>
           <p:nvPr/>
         </p:nvSpPr>
         <p:spPr>
           <a:xfrm>
-            <a:off x="548640" y="1371600"/>
-            <a:ext cx="4572000" cy="457200"/>
+            <a:off x="5989320" y="1463040"/>
+            <a:ext cx="2651760" cy="274320"/>
           </a:xfrm>
           <a:prstGeom prst="rect">
             <a:avLst/>
@@ -3638,30 +4056,30 @@
               <a:buNone/>
             </a:pPr>
             <a:r>
-              <a:rPr lang="en-US" sz="2400" b="1" dirty="0">
-                <a:solidFill>
-                  <a:srgbClr val="1A1A1A"/>
+              <a:rPr lang="en-US" sz="1100" spc="300" kern="0" dirty="0">
+                <a:solidFill>
+                  <a:srgbClr val="C4421D"/>
                 </a:solidFill>
                 <a:latin typeface="Jost" pitchFamily="34" charset="0"/>
                 <a:ea typeface="Jost" pitchFamily="34" charset="-122"/>
                 <a:cs typeface="Jost" pitchFamily="34" charset="-120"/>
               </a:rPr>
-              <a:t>Jost Bold — Headlines</a:t>
-            </a:r>
-            <a:endParaRPr lang="en-US" sz="2400" dirty="0"/>
-          </a:p>
-        </p:txBody>
-      </p:sp>
-      <p:sp>
-        <p:nvSpPr>
-          <p:cNvPr id="4" name="Text 2"/>
+              <a:t>WHY IT WORKS</a:t>
+            </a:r>
+            <a:endParaRPr lang="en-US" sz="1100" dirty="0"/>
+          </a:p>
+        </p:txBody>
+      </p:sp>
+      <p:sp>
+        <p:nvSpPr>
+          <p:cNvPr id="5" name="Text 2"/>
           <p:cNvSpPr txBox="1"/>
           <p:nvPr/>
         </p:nvSpPr>
         <p:spPr>
           <a:xfrm>
-            <a:off x="548640" y="1920240"/>
-            <a:ext cx="4572000" cy="365760"/>
+            <a:off x="5989320" y="1783080"/>
+            <a:ext cx="2651760" cy="1463040"/>
           </a:xfrm>
           <a:prstGeom prst="rect">
             <a:avLst/>
@@ -3673,50 +4091,15 @@
           <a:bodyPr wrap="square" lIns="0" tIns="0" rIns="0" bIns="0" rtlCol="0" anchor="t"/>
           <a:lstStyle/>
           <a:p>
-            <a:pPr indent="0" marL="0">
-              <a:buNone/>
-            </a:pPr>
-            <a:r>
-              <a:rPr lang="en-US" sz="1400" spc="400" kern="0" dirty="0">
-                <a:solidFill>
-                  <a:srgbClr val="1A1A1A"/>
-                </a:solidFill>
-                <a:latin typeface="Jost" pitchFamily="34" charset="0"/>
-                <a:ea typeface="Jost" pitchFamily="34" charset="-122"/>
-                <a:cs typeface="Jost" pitchFamily="34" charset="-120"/>
-              </a:rPr>
-              <a:t>JOST — SECTION LABELS</a:t>
-            </a:r>
-            <a:endParaRPr lang="en-US" sz="1400" dirty="0"/>
-          </a:p>
-        </p:txBody>
-      </p:sp>
-      <p:sp>
-        <p:nvSpPr>
-          <p:cNvPr id="5" name="Text 3"/>
-          <p:cNvSpPr txBox="1"/>
-          <p:nvPr/>
-        </p:nvSpPr>
-        <p:spPr>
-          <a:xfrm>
-            <a:off x="548640" y="2377440"/>
-            <a:ext cx="4389120" cy="731520"/>
-          </a:xfrm>
-          <a:prstGeom prst="rect">
-            <a:avLst/>
-          </a:prstGeom>
-          <a:noFill/>
-          <a:ln/>
-        </p:spPr>
-        <p:txBody>
-          <a:bodyPr wrap="square" lIns="0" tIns="0" rIns="0" bIns="0" rtlCol="0" anchor="t"/>
-          <a:lstStyle/>
-          <a:p>
-            <a:pPr indent="0" marL="0">
-              <a:buNone/>
-            </a:pPr>
-            <a:r>
-              <a:rPr lang="en-US" sz="1400" dirty="0">
+            <a:pPr marL="342900" indent="-342900">
+              <a:spcAft>
+                <a:spcPts val="600"/>
+              </a:spcAft>
+              <a:buSzPct val="100000"/>
+              <a:buChar char="•"/>
+            </a:pPr>
+            <a:r>
+              <a:rPr lang="en-US" sz="1300" dirty="0">
                 <a:solidFill>
                   <a:srgbClr val="1A1A1A"/>
                 </a:solidFill>
@@ -3724,46 +4107,88 @@
                 <a:ea typeface="Nunito Sans" pitchFamily="34" charset="-122"/>
                 <a:cs typeface="Nunito Sans" pitchFamily="34" charset="-120"/>
               </a:rPr>
-              <a:t>Nunito Sans — body text for slides, documents and diagram labels. Readable at small sizes.</a:t>
-            </a:r>
-            <a:endParaRPr lang="en-US" sz="1400" dirty="0"/>
-          </a:p>
-        </p:txBody>
-      </p:sp>
-      <p:sp>
-        <p:nvSpPr>
-          <p:cNvPr id="6" name="Text 4"/>
-          <p:cNvSpPr txBox="1"/>
-          <p:nvPr/>
-        </p:nvSpPr>
-        <p:spPr>
-          <a:xfrm>
-            <a:off x="548640" y="3291840"/>
-            <a:ext cx="4389120" cy="365760"/>
-          </a:xfrm>
-          <a:prstGeom prst="rect">
-            <a:avLst/>
-          </a:prstGeom>
-          <a:noFill/>
-          <a:ln/>
-        </p:spPr>
-        <p:txBody>
-          <a:bodyPr wrap="square" lIns="0" tIns="0" rIns="0" bIns="0" rtlCol="0" anchor="t"/>
-          <a:lstStyle/>
-          <a:p>
-            <a:pPr indent="0" marL="0">
-              <a:buNone/>
-            </a:pPr>
-            <a:r>
-              <a:rPr lang="en-US" sz="1100" dirty="0">
-                <a:solidFill>
-                  <a:srgbClr val="6B6B6B"/>
+              <a:t>Headline states the finding</a:t>
+            </a:r>
+            <a:endParaRPr lang="en-US" sz="1300" dirty="0"/>
+          </a:p>
+          <a:p>
+            <a:pPr marL="342900" indent="-342900">
+              <a:spcAft>
+                <a:spcPts val="600"/>
+              </a:spcAft>
+              <a:buSzPct val="100000"/>
+              <a:buChar char="•"/>
+            </a:pPr>
+            <a:r>
+              <a:rPr lang="en-US" sz="1300" dirty="0">
+                <a:solidFill>
+                  <a:srgbClr val="1A1A1A"/>
                 </a:solidFill>
                 <a:latin typeface="Nunito Sans" pitchFamily="34" charset="0"/>
                 <a:ea typeface="Nunito Sans" pitchFamily="34" charset="-122"/>
                 <a:cs typeface="Nunito Sans" pitchFamily="34" charset="-120"/>
               </a:rPr>
-              <a:t>Master tier (print / licensed): Futura PT + Avenir Next</a:t>
+              <a:t>Only the bar that matters is in the accent</a:t>
+            </a:r>
+            <a:endParaRPr lang="en-US" sz="1300" dirty="0"/>
+          </a:p>
+          <a:p>
+            <a:pPr marL="342900" indent="-342900">
+              <a:spcAft>
+                <a:spcPts val="600"/>
+              </a:spcAft>
+              <a:buSzPct val="100000"/>
+              <a:buChar char="•"/>
+            </a:pPr>
+            <a:r>
+              <a:rPr lang="en-US" sz="1300" dirty="0">
+                <a:solidFill>
+                  <a:srgbClr val="1A1A1A"/>
+                </a:solidFill>
+                <a:latin typeface="Nunito Sans" pitchFamily="34" charset="0"/>
+                <a:ea typeface="Nunito Sans" pitchFamily="34" charset="-122"/>
+                <a:cs typeface="Nunito Sans" pitchFamily="34" charset="-120"/>
+              </a:rPr>
+              <a:t>Values labelled, no gridlines, one axis</a:t>
+            </a:r>
+            <a:endParaRPr lang="en-US" sz="1300" dirty="0"/>
+          </a:p>
+        </p:txBody>
+      </p:sp>
+      <p:sp>
+        <p:nvSpPr>
+          <p:cNvPr id="6" name="Text 3"/>
+          <p:cNvSpPr txBox="1"/>
+          <p:nvPr/>
+        </p:nvSpPr>
+        <p:spPr>
+          <a:xfrm>
+            <a:off x="5989320" y="3337560"/>
+            <a:ext cx="2651760" cy="274320"/>
+          </a:xfrm>
+          <a:prstGeom prst="rect">
+            <a:avLst/>
+          </a:prstGeom>
+          <a:noFill/>
+          <a:ln/>
+        </p:spPr>
+        <p:txBody>
+          <a:bodyPr wrap="square" lIns="0" tIns="0" rIns="0" bIns="0" rtlCol="0" anchor="t"/>
+          <a:lstStyle/>
+          <a:p>
+            <a:pPr indent="0" marL="0">
+              <a:buNone/>
+            </a:pPr>
+            <a:r>
+              <a:rPr lang="en-US" sz="1100" dirty="0">
+                <a:solidFill>
+                  <a:srgbClr val="6B6B6B"/>
+                </a:solidFill>
+                <a:latin typeface="Nunito Sans" pitchFamily="34" charset="0"/>
+                <a:ea typeface="Nunito Sans" pitchFamily="34" charset="-122"/>
+                <a:cs typeface="Nunito Sans" pitchFamily="34" charset="-120"/>
+              </a:rPr>
+              <a:t>Series order when colour is needed:</a:t>
             </a:r>
             <a:endParaRPr lang="en-US" sz="1100" dirty="0"/>
           </a:p>
@@ -3771,78 +4196,14 @@
       </p:sp>
       <p:sp>
         <p:nvSpPr>
-          <p:cNvPr id="7" name="Shape 5"/>
+          <p:cNvPr id="7" name="Shape 4"/>
           <p:cNvSpPr/>
           <p:nvPr/>
         </p:nvSpPr>
         <p:spPr>
           <a:xfrm>
-            <a:off x="5852160" y="1325880"/>
-            <a:ext cx="457200" cy="457200"/>
-          </a:xfrm>
-          <a:prstGeom prst="rect">
-            <a:avLst/>
-          </a:prstGeom>
-          <a:solidFill>
-            <a:srgbClr val="1A1A1A"/>
-          </a:solidFill>
-          <a:ln w="9525">
-            <a:solidFill>
-              <a:srgbClr val="E3E3E3"/>
-            </a:solidFill>
-            <a:prstDash val="solid"/>
-          </a:ln>
-        </p:spPr>
-      </p:sp>
-      <p:sp>
-        <p:nvSpPr>
-          <p:cNvPr id="8" name="Text 6"/>
-          <p:cNvSpPr txBox="1"/>
-          <p:nvPr/>
-        </p:nvSpPr>
-        <p:spPr>
-          <a:xfrm>
-            <a:off x="6446520" y="1417320"/>
-            <a:ext cx="2103120" cy="274320"/>
-          </a:xfrm>
-          <a:prstGeom prst="rect">
-            <a:avLst/>
-          </a:prstGeom>
-          <a:noFill/>
-          <a:ln/>
-        </p:spPr>
-        <p:txBody>
-          <a:bodyPr wrap="square" lIns="0" tIns="0" rIns="0" bIns="0" rtlCol="0" anchor="t"/>
-          <a:lstStyle/>
-          <a:p>
-            <a:pPr indent="0" marL="0">
-              <a:buNone/>
-            </a:pPr>
-            <a:r>
-              <a:rPr lang="en-US" sz="1200" dirty="0">
-                <a:solidFill>
-                  <a:srgbClr val="1A1A1A"/>
-                </a:solidFill>
-                <a:latin typeface="Jost" pitchFamily="34" charset="0"/>
-                <a:ea typeface="Jost" pitchFamily="34" charset="-122"/>
-                <a:cs typeface="Jost" pitchFamily="34" charset="-120"/>
-              </a:rPr>
-              <a:t>ink  #1A1A1A</a:t>
-            </a:r>
-            <a:endParaRPr lang="en-US" sz="1200" dirty="0"/>
-          </a:p>
-        </p:txBody>
-      </p:sp>
-      <p:sp>
-        <p:nvSpPr>
-          <p:cNvPr id="9" name="Shape 7"/>
-          <p:cNvSpPr/>
-          <p:nvPr/>
-        </p:nvSpPr>
-        <p:spPr>
-          <a:xfrm>
-            <a:off x="5852160" y="1947672"/>
-            <a:ext cx="457200" cy="457200"/>
+            <a:off x="5989320" y="3657600"/>
+            <a:ext cx="274320" cy="274320"/>
           </a:xfrm>
           <a:prstGeom prst="rect">
             <a:avLst/>
@@ -3850,248 +4211,132 @@
           <a:solidFill>
             <a:srgbClr val="E4572E"/>
           </a:solidFill>
-          <a:ln w="9525">
-            <a:solidFill>
-              <a:srgbClr val="E3E3E3"/>
-            </a:solidFill>
-            <a:prstDash val="solid"/>
-          </a:ln>
-        </p:spPr>
-      </p:sp>
-      <p:sp>
-        <p:nvSpPr>
-          <p:cNvPr id="10" name="Text 8"/>
-          <p:cNvSpPr txBox="1"/>
-          <p:nvPr/>
-        </p:nvSpPr>
-        <p:spPr>
-          <a:xfrm>
-            <a:off x="6446520" y="2039112"/>
-            <a:ext cx="2103120" cy="274320"/>
-          </a:xfrm>
-          <a:prstGeom prst="rect">
-            <a:avLst/>
-          </a:prstGeom>
-          <a:noFill/>
-          <a:ln/>
-        </p:spPr>
-        <p:txBody>
-          <a:bodyPr wrap="square" lIns="0" tIns="0" rIns="0" bIns="0" rtlCol="0" anchor="t"/>
-          <a:lstStyle/>
-          <a:p>
-            <a:pPr indent="0" marL="0">
-              <a:buNone/>
-            </a:pPr>
-            <a:r>
-              <a:rPr lang="en-US" sz="1200" dirty="0">
-                <a:solidFill>
-                  <a:srgbClr val="1A1A1A"/>
-                </a:solidFill>
-                <a:latin typeface="Jost" pitchFamily="34" charset="0"/>
-                <a:ea typeface="Jost" pitchFamily="34" charset="-122"/>
-                <a:cs typeface="Jost" pitchFamily="34" charset="-120"/>
-              </a:rPr>
-              <a:t>accent  #E4572E</a:t>
-            </a:r>
-            <a:endParaRPr lang="en-US" sz="1200" dirty="0"/>
-          </a:p>
-        </p:txBody>
-      </p:sp>
-      <p:sp>
-        <p:nvSpPr>
-          <p:cNvPr id="11" name="Shape 9"/>
+          <a:ln/>
+        </p:spPr>
+      </p:sp>
+      <p:sp>
+        <p:nvSpPr>
+          <p:cNvPr id="8" name="Shape 5"/>
           <p:cNvSpPr/>
           <p:nvPr/>
         </p:nvSpPr>
         <p:spPr>
           <a:xfrm>
-            <a:off x="5852160" y="2569464"/>
-            <a:ext cx="457200" cy="457200"/>
+            <a:off x="6355080" y="3657600"/>
+            <a:ext cx="274320" cy="274320"/>
           </a:xfrm>
           <a:prstGeom prst="rect">
             <a:avLst/>
           </a:prstGeom>
           <a:solidFill>
-            <a:srgbClr val="C4421D"/>
+            <a:srgbClr val="2A78D6"/>
           </a:solidFill>
-          <a:ln w="9525">
-            <a:solidFill>
-              <a:srgbClr val="E3E3E3"/>
-            </a:solidFill>
-            <a:prstDash val="solid"/>
-          </a:ln>
-        </p:spPr>
-      </p:sp>
-      <p:sp>
-        <p:nvSpPr>
-          <p:cNvPr id="12" name="Text 10"/>
-          <p:cNvSpPr txBox="1"/>
-          <p:nvPr/>
-        </p:nvSpPr>
-        <p:spPr>
-          <a:xfrm>
-            <a:off x="6446520" y="2660904"/>
-            <a:ext cx="2103120" cy="274320"/>
-          </a:xfrm>
-          <a:prstGeom prst="rect">
-            <a:avLst/>
-          </a:prstGeom>
-          <a:noFill/>
-          <a:ln/>
-        </p:spPr>
-        <p:txBody>
-          <a:bodyPr wrap="square" lIns="0" tIns="0" rIns="0" bIns="0" rtlCol="0" anchor="t"/>
-          <a:lstStyle/>
-          <a:p>
-            <a:pPr indent="0" marL="0">
-              <a:buNone/>
-            </a:pPr>
-            <a:r>
-              <a:rPr lang="en-US" sz="1200" dirty="0">
-                <a:solidFill>
-                  <a:srgbClr val="1A1A1A"/>
-                </a:solidFill>
-                <a:latin typeface="Jost" pitchFamily="34" charset="0"/>
-                <a:ea typeface="Jost" pitchFamily="34" charset="-122"/>
-                <a:cs typeface="Jost" pitchFamily="34" charset="-120"/>
-              </a:rPr>
-              <a:t>accent text  #C4421D</a:t>
-            </a:r>
-            <a:endParaRPr lang="en-US" sz="1200" dirty="0"/>
-          </a:p>
-        </p:txBody>
-      </p:sp>
-      <p:sp>
-        <p:nvSpPr>
-          <p:cNvPr id="13" name="Shape 11"/>
+          <a:ln/>
+        </p:spPr>
+      </p:sp>
+      <p:sp>
+        <p:nvSpPr>
+          <p:cNvPr id="9" name="Shape 6"/>
           <p:cNvSpPr/>
           <p:nvPr/>
         </p:nvSpPr>
         <p:spPr>
           <a:xfrm>
-            <a:off x="5852160" y="3191256"/>
-            <a:ext cx="457200" cy="457200"/>
+            <a:off x="6720840" y="3657600"/>
+            <a:ext cx="274320" cy="274320"/>
           </a:xfrm>
           <a:prstGeom prst="rect">
             <a:avLst/>
           </a:prstGeom>
           <a:solidFill>
-            <a:srgbClr val="6B6B6B"/>
+            <a:srgbClr val="1BAF7A"/>
           </a:solidFill>
-          <a:ln w="9525">
-            <a:solidFill>
-              <a:srgbClr val="E3E3E3"/>
-            </a:solidFill>
-            <a:prstDash val="solid"/>
-          </a:ln>
-        </p:spPr>
-      </p:sp>
-      <p:sp>
-        <p:nvSpPr>
-          <p:cNvPr id="14" name="Text 12"/>
-          <p:cNvSpPr txBox="1"/>
-          <p:nvPr/>
-        </p:nvSpPr>
-        <p:spPr>
-          <a:xfrm>
-            <a:off x="6446520" y="3282696"/>
-            <a:ext cx="2103120" cy="274320"/>
-          </a:xfrm>
-          <a:prstGeom prst="rect">
-            <a:avLst/>
-          </a:prstGeom>
-          <a:noFill/>
-          <a:ln/>
-        </p:spPr>
-        <p:txBody>
-          <a:bodyPr wrap="square" lIns="0" tIns="0" rIns="0" bIns="0" rtlCol="0" anchor="t"/>
-          <a:lstStyle/>
-          <a:p>
-            <a:pPr indent="0" marL="0">
-              <a:buNone/>
-            </a:pPr>
-            <a:r>
-              <a:rPr lang="en-US" sz="1200" dirty="0">
-                <a:solidFill>
-                  <a:srgbClr val="1A1A1A"/>
-                </a:solidFill>
-                <a:latin typeface="Jost" pitchFamily="34" charset="0"/>
-                <a:ea typeface="Jost" pitchFamily="34" charset="-122"/>
-                <a:cs typeface="Jost" pitchFamily="34" charset="-120"/>
-              </a:rPr>
-              <a:t>muted  #6B6B6B</a:t>
-            </a:r>
-            <a:endParaRPr lang="en-US" sz="1200" dirty="0"/>
-          </a:p>
-        </p:txBody>
-      </p:sp>
-      <p:sp>
-        <p:nvSpPr>
-          <p:cNvPr id="15" name="Shape 13"/>
+          <a:ln/>
+        </p:spPr>
+      </p:sp>
+      <p:sp>
+        <p:nvSpPr>
+          <p:cNvPr id="10" name="Shape 7"/>
           <p:cNvSpPr/>
           <p:nvPr/>
         </p:nvSpPr>
         <p:spPr>
           <a:xfrm>
-            <a:off x="5852160" y="3813048"/>
-            <a:ext cx="457200" cy="457200"/>
+            <a:off x="7086600" y="3657600"/>
+            <a:ext cx="274320" cy="274320"/>
           </a:xfrm>
           <a:prstGeom prst="rect">
             <a:avLst/>
           </a:prstGeom>
           <a:solidFill>
-            <a:srgbClr val="E3E3E3"/>
+            <a:srgbClr val="EDA100"/>
           </a:solidFill>
-          <a:ln w="9525">
-            <a:solidFill>
-              <a:srgbClr val="E3E3E3"/>
-            </a:solidFill>
-            <a:prstDash val="solid"/>
-          </a:ln>
-        </p:spPr>
-      </p:sp>
-      <p:sp>
-        <p:nvSpPr>
-          <p:cNvPr id="16" name="Text 14"/>
-          <p:cNvSpPr txBox="1"/>
+          <a:ln/>
+        </p:spPr>
+      </p:sp>
+      <p:sp>
+        <p:nvSpPr>
+          <p:cNvPr id="11" name="Shape 8"/>
+          <p:cNvSpPr/>
           <p:nvPr/>
         </p:nvSpPr>
         <p:spPr>
           <a:xfrm>
-            <a:off x="6446520" y="3904488"/>
-            <a:ext cx="2103120" cy="274320"/>
-          </a:xfrm>
-          <a:prstGeom prst="rect">
-            <a:avLst/>
-          </a:prstGeom>
-          <a:noFill/>
-          <a:ln/>
-        </p:spPr>
-        <p:txBody>
-          <a:bodyPr wrap="square" lIns="0" tIns="0" rIns="0" bIns="0" rtlCol="0" anchor="t"/>
-          <a:lstStyle/>
-          <a:p>
-            <a:pPr indent="0" marL="0">
-              <a:buNone/>
-            </a:pPr>
-            <a:r>
-              <a:rPr lang="en-US" sz="1200" dirty="0">
-                <a:solidFill>
-                  <a:srgbClr val="1A1A1A"/>
-                </a:solidFill>
-                <a:latin typeface="Jost" pitchFamily="34" charset="0"/>
-                <a:ea typeface="Jost" pitchFamily="34" charset="-122"/>
-                <a:cs typeface="Jost" pitchFamily="34" charset="-120"/>
-              </a:rPr>
-              <a:t>line  #E3E3E3</a:t>
-            </a:r>
-            <a:endParaRPr lang="en-US" sz="1200" dirty="0"/>
-          </a:p>
-        </p:txBody>
-      </p:sp>
-      <p:sp>
-        <p:nvSpPr>
-          <p:cNvPr id="17" name="Text 0"/>
+            <a:off x="7452360" y="3657600"/>
+            <a:ext cx="274320" cy="274320"/>
+          </a:xfrm>
+          <a:prstGeom prst="rect">
+            <a:avLst/>
+          </a:prstGeom>
+          <a:solidFill>
+            <a:srgbClr val="4A3AA7"/>
+          </a:solidFill>
+          <a:ln/>
+        </p:spPr>
+      </p:sp>
+      <p:sp>
+        <p:nvSpPr>
+          <p:cNvPr id="12" name="Shape 9"/>
+          <p:cNvSpPr/>
+          <p:nvPr/>
+        </p:nvSpPr>
+        <p:spPr>
+          <a:xfrm>
+            <a:off x="7818120" y="3657600"/>
+            <a:ext cx="274320" cy="274320"/>
+          </a:xfrm>
+          <a:prstGeom prst="rect">
+            <a:avLst/>
+          </a:prstGeom>
+          <a:solidFill>
+            <a:srgbClr val="E87BA4"/>
+          </a:solidFill>
+          <a:ln/>
+        </p:spPr>
+      </p:sp>
+      <p:sp>
+        <p:nvSpPr>
+          <p:cNvPr id="13" name="Shape 10"/>
+          <p:cNvSpPr/>
+          <p:nvPr/>
+        </p:nvSpPr>
+        <p:spPr>
+          <a:xfrm>
+            <a:off x="8183880" y="3657600"/>
+            <a:ext cx="274320" cy="274320"/>
+          </a:xfrm>
+          <a:prstGeom prst="rect">
+            <a:avLst/>
+          </a:prstGeom>
+          <a:solidFill>
+            <a:srgbClr val="008300"/>
+          </a:solidFill>
+          <a:ln/>
+        </p:spPr>
+      </p:sp>
+      <p:sp>
+        <p:nvSpPr>
+          <p:cNvPr id="14" name="Text 0"/>
           <p:cNvSpPr/>
           <p:nvPr>
             <p:ph idx="101" type="body" hasCustomPrompt="1"/>
@@ -4178,6 +4423,626 @@
 <file path=ppt/slides/slide7.xml><?xml version="1.0" encoding="utf-8"?>
 <p:sld xmlns:a="http://schemas.openxmlformats.org/drawingml/2006/main" xmlns:r="http://schemas.openxmlformats.org/officeDocument/2006/relationships" xmlns:p="http://schemas.openxmlformats.org/presentationml/2006/main">
   <p:cSld name="Slide 7">
+    <p:spTree>
+      <p:nvGrpSpPr>
+        <p:cNvPr id="1" name=""/>
+        <p:cNvGrpSpPr/>
+        <p:nvPr/>
+      </p:nvGrpSpPr>
+      <p:grpSpPr>
+        <a:xfrm>
+          <a:off x="0" y="0"/>
+          <a:ext cx="0" cy="0"/>
+          <a:chOff x="0" y="0"/>
+          <a:chExt cx="0" cy="0"/>
+        </a:xfrm>
+      </p:grpSpPr>
+      <p:sp>
+        <p:nvSpPr>
+          <p:cNvPr id="2" name="Text 0"/>
+          <p:cNvSpPr/>
+          <p:nvPr>
+            <p:ph idx="100" type="title" hasCustomPrompt="1"/>
+          </p:nvPr>
+        </p:nvSpPr>
+        <p:spPr>
+          <a:xfrm>
+            <a:off x="548640" y="411480"/>
+            <a:ext cx="8046720" cy="822960"/>
+          </a:xfrm>
+          <a:prstGeom prst="rect">
+            <a:avLst/>
+          </a:prstGeom>
+          <a:noFill/>
+          <a:ln/>
+        </p:spPr>
+        <p:txBody>
+          <a:bodyPr wrap="square" lIns="0" tIns="0" rIns="0" bIns="0" rtlCol="0" anchor="t"/>
+          <a:lstStyle/>
+          <a:p>
+            <a:pPr algn="l" indent="0" marL="0">
+              <a:buNone/>
+            </a:pPr>
+            <a:r>
+              <a:rPr lang="en-US" sz="2800" b="1" dirty="0">
+                <a:solidFill>
+                  <a:srgbClr val="1A1A1A"/>
+                </a:solidFill>
+                <a:latin typeface="Jost" pitchFamily="34" charset="0"/>
+                <a:ea typeface="Jost" pitchFamily="34" charset="-122"/>
+                <a:cs typeface="Jost" pitchFamily="34" charset="-120"/>
+              </a:rPr>
+              <a:t>Type &amp; colour reference</a:t>
+            </a:r>
+            <a:endParaRPr lang="en-US" sz="2800" dirty="0"/>
+          </a:p>
+        </p:txBody>
+      </p:sp>
+      <p:sp>
+        <p:nvSpPr>
+          <p:cNvPr id="3" name="Text 1"/>
+          <p:cNvSpPr txBox="1"/>
+          <p:nvPr/>
+        </p:nvSpPr>
+        <p:spPr>
+          <a:xfrm>
+            <a:off x="548640" y="1371600"/>
+            <a:ext cx="4572000" cy="457200"/>
+          </a:xfrm>
+          <a:prstGeom prst="rect">
+            <a:avLst/>
+          </a:prstGeom>
+          <a:noFill/>
+          <a:ln/>
+        </p:spPr>
+        <p:txBody>
+          <a:bodyPr wrap="square" lIns="0" tIns="0" rIns="0" bIns="0" rtlCol="0" anchor="t"/>
+          <a:lstStyle/>
+          <a:p>
+            <a:pPr indent="0" marL="0">
+              <a:buNone/>
+            </a:pPr>
+            <a:r>
+              <a:rPr lang="en-US" sz="2400" b="1" dirty="0">
+                <a:solidFill>
+                  <a:srgbClr val="1A1A1A"/>
+                </a:solidFill>
+                <a:latin typeface="Jost" pitchFamily="34" charset="0"/>
+                <a:ea typeface="Jost" pitchFamily="34" charset="-122"/>
+                <a:cs typeface="Jost" pitchFamily="34" charset="-120"/>
+              </a:rPr>
+              <a:t>Jost Bold — Headlines</a:t>
+            </a:r>
+            <a:endParaRPr lang="en-US" sz="2400" dirty="0"/>
+          </a:p>
+        </p:txBody>
+      </p:sp>
+      <p:sp>
+        <p:nvSpPr>
+          <p:cNvPr id="4" name="Text 2"/>
+          <p:cNvSpPr txBox="1"/>
+          <p:nvPr/>
+        </p:nvSpPr>
+        <p:spPr>
+          <a:xfrm>
+            <a:off x="548640" y="1920240"/>
+            <a:ext cx="4572000" cy="365760"/>
+          </a:xfrm>
+          <a:prstGeom prst="rect">
+            <a:avLst/>
+          </a:prstGeom>
+          <a:noFill/>
+          <a:ln/>
+        </p:spPr>
+        <p:txBody>
+          <a:bodyPr wrap="square" lIns="0" tIns="0" rIns="0" bIns="0" rtlCol="0" anchor="t"/>
+          <a:lstStyle/>
+          <a:p>
+            <a:pPr indent="0" marL="0">
+              <a:buNone/>
+            </a:pPr>
+            <a:r>
+              <a:rPr lang="en-US" sz="1400" spc="400" kern="0" dirty="0">
+                <a:solidFill>
+                  <a:srgbClr val="1A1A1A"/>
+                </a:solidFill>
+                <a:latin typeface="Jost" pitchFamily="34" charset="0"/>
+                <a:ea typeface="Jost" pitchFamily="34" charset="-122"/>
+                <a:cs typeface="Jost" pitchFamily="34" charset="-120"/>
+              </a:rPr>
+              <a:t>JOST — SECTION LABELS</a:t>
+            </a:r>
+            <a:endParaRPr lang="en-US" sz="1400" dirty="0"/>
+          </a:p>
+        </p:txBody>
+      </p:sp>
+      <p:sp>
+        <p:nvSpPr>
+          <p:cNvPr id="5" name="Text 3"/>
+          <p:cNvSpPr txBox="1"/>
+          <p:nvPr/>
+        </p:nvSpPr>
+        <p:spPr>
+          <a:xfrm>
+            <a:off x="548640" y="2377440"/>
+            <a:ext cx="4389120" cy="731520"/>
+          </a:xfrm>
+          <a:prstGeom prst="rect">
+            <a:avLst/>
+          </a:prstGeom>
+          <a:noFill/>
+          <a:ln/>
+        </p:spPr>
+        <p:txBody>
+          <a:bodyPr wrap="square" lIns="0" tIns="0" rIns="0" bIns="0" rtlCol="0" anchor="t"/>
+          <a:lstStyle/>
+          <a:p>
+            <a:pPr indent="0" marL="0">
+              <a:buNone/>
+            </a:pPr>
+            <a:r>
+              <a:rPr lang="en-US" sz="1400" dirty="0">
+                <a:solidFill>
+                  <a:srgbClr val="1A1A1A"/>
+                </a:solidFill>
+                <a:latin typeface="Nunito Sans" pitchFamily="34" charset="0"/>
+                <a:ea typeface="Nunito Sans" pitchFamily="34" charset="-122"/>
+                <a:cs typeface="Nunito Sans" pitchFamily="34" charset="-120"/>
+              </a:rPr>
+              <a:t>Nunito Sans — body text for slides, documents and diagram labels. Readable at small sizes.</a:t>
+            </a:r>
+            <a:endParaRPr lang="en-US" sz="1400" dirty="0"/>
+          </a:p>
+        </p:txBody>
+      </p:sp>
+      <p:sp>
+        <p:nvSpPr>
+          <p:cNvPr id="6" name="Text 4"/>
+          <p:cNvSpPr txBox="1"/>
+          <p:nvPr/>
+        </p:nvSpPr>
+        <p:spPr>
+          <a:xfrm>
+            <a:off x="548640" y="3291840"/>
+            <a:ext cx="4389120" cy="365760"/>
+          </a:xfrm>
+          <a:prstGeom prst="rect">
+            <a:avLst/>
+          </a:prstGeom>
+          <a:noFill/>
+          <a:ln/>
+        </p:spPr>
+        <p:txBody>
+          <a:bodyPr wrap="square" lIns="0" tIns="0" rIns="0" bIns="0" rtlCol="0" anchor="t"/>
+          <a:lstStyle/>
+          <a:p>
+            <a:pPr indent="0" marL="0">
+              <a:buNone/>
+            </a:pPr>
+            <a:r>
+              <a:rPr lang="en-US" sz="1100" dirty="0">
+                <a:solidFill>
+                  <a:srgbClr val="6B6B6B"/>
+                </a:solidFill>
+                <a:latin typeface="Nunito Sans" pitchFamily="34" charset="0"/>
+                <a:ea typeface="Nunito Sans" pitchFamily="34" charset="-122"/>
+                <a:cs typeface="Nunito Sans" pitchFamily="34" charset="-120"/>
+              </a:rPr>
+              <a:t>Master tier (print / licensed): Futura PT + Avenir Next</a:t>
+            </a:r>
+            <a:endParaRPr lang="en-US" sz="1100" dirty="0"/>
+          </a:p>
+        </p:txBody>
+      </p:sp>
+      <p:sp>
+        <p:nvSpPr>
+          <p:cNvPr id="7" name="Shape 5"/>
+          <p:cNvSpPr/>
+          <p:nvPr/>
+        </p:nvSpPr>
+        <p:spPr>
+          <a:xfrm>
+            <a:off x="5852160" y="1325880"/>
+            <a:ext cx="457200" cy="457200"/>
+          </a:xfrm>
+          <a:prstGeom prst="rect">
+            <a:avLst/>
+          </a:prstGeom>
+          <a:solidFill>
+            <a:srgbClr val="1A1A1A"/>
+          </a:solidFill>
+          <a:ln w="9525">
+            <a:solidFill>
+              <a:srgbClr val="E3E3E3"/>
+            </a:solidFill>
+            <a:prstDash val="solid"/>
+          </a:ln>
+        </p:spPr>
+      </p:sp>
+      <p:sp>
+        <p:nvSpPr>
+          <p:cNvPr id="8" name="Text 6"/>
+          <p:cNvSpPr txBox="1"/>
+          <p:nvPr/>
+        </p:nvSpPr>
+        <p:spPr>
+          <a:xfrm>
+            <a:off x="6446520" y="1417320"/>
+            <a:ext cx="2103120" cy="274320"/>
+          </a:xfrm>
+          <a:prstGeom prst="rect">
+            <a:avLst/>
+          </a:prstGeom>
+          <a:noFill/>
+          <a:ln/>
+        </p:spPr>
+        <p:txBody>
+          <a:bodyPr wrap="square" lIns="0" tIns="0" rIns="0" bIns="0" rtlCol="0" anchor="t"/>
+          <a:lstStyle/>
+          <a:p>
+            <a:pPr indent="0" marL="0">
+              <a:buNone/>
+            </a:pPr>
+            <a:r>
+              <a:rPr lang="en-US" sz="1200" dirty="0">
+                <a:solidFill>
+                  <a:srgbClr val="1A1A1A"/>
+                </a:solidFill>
+                <a:latin typeface="Jost" pitchFamily="34" charset="0"/>
+                <a:ea typeface="Jost" pitchFamily="34" charset="-122"/>
+                <a:cs typeface="Jost" pitchFamily="34" charset="-120"/>
+              </a:rPr>
+              <a:t>ink  #1A1A1A</a:t>
+            </a:r>
+            <a:endParaRPr lang="en-US" sz="1200" dirty="0"/>
+          </a:p>
+        </p:txBody>
+      </p:sp>
+      <p:sp>
+        <p:nvSpPr>
+          <p:cNvPr id="9" name="Shape 7"/>
+          <p:cNvSpPr/>
+          <p:nvPr/>
+        </p:nvSpPr>
+        <p:spPr>
+          <a:xfrm>
+            <a:off x="5852160" y="1947672"/>
+            <a:ext cx="457200" cy="457200"/>
+          </a:xfrm>
+          <a:prstGeom prst="rect">
+            <a:avLst/>
+          </a:prstGeom>
+          <a:solidFill>
+            <a:srgbClr val="E4572E"/>
+          </a:solidFill>
+          <a:ln w="9525">
+            <a:solidFill>
+              <a:srgbClr val="E3E3E3"/>
+            </a:solidFill>
+            <a:prstDash val="solid"/>
+          </a:ln>
+        </p:spPr>
+      </p:sp>
+      <p:sp>
+        <p:nvSpPr>
+          <p:cNvPr id="10" name="Text 8"/>
+          <p:cNvSpPr txBox="1"/>
+          <p:nvPr/>
+        </p:nvSpPr>
+        <p:spPr>
+          <a:xfrm>
+            <a:off x="6446520" y="2039112"/>
+            <a:ext cx="2103120" cy="274320"/>
+          </a:xfrm>
+          <a:prstGeom prst="rect">
+            <a:avLst/>
+          </a:prstGeom>
+          <a:noFill/>
+          <a:ln/>
+        </p:spPr>
+        <p:txBody>
+          <a:bodyPr wrap="square" lIns="0" tIns="0" rIns="0" bIns="0" rtlCol="0" anchor="t"/>
+          <a:lstStyle/>
+          <a:p>
+            <a:pPr indent="0" marL="0">
+              <a:buNone/>
+            </a:pPr>
+            <a:r>
+              <a:rPr lang="en-US" sz="1200" dirty="0">
+                <a:solidFill>
+                  <a:srgbClr val="1A1A1A"/>
+                </a:solidFill>
+                <a:latin typeface="Jost" pitchFamily="34" charset="0"/>
+                <a:ea typeface="Jost" pitchFamily="34" charset="-122"/>
+                <a:cs typeface="Jost" pitchFamily="34" charset="-120"/>
+              </a:rPr>
+              <a:t>accent  #E4572E</a:t>
+            </a:r>
+            <a:endParaRPr lang="en-US" sz="1200" dirty="0"/>
+          </a:p>
+        </p:txBody>
+      </p:sp>
+      <p:sp>
+        <p:nvSpPr>
+          <p:cNvPr id="11" name="Shape 9"/>
+          <p:cNvSpPr/>
+          <p:nvPr/>
+        </p:nvSpPr>
+        <p:spPr>
+          <a:xfrm>
+            <a:off x="5852160" y="2569464"/>
+            <a:ext cx="457200" cy="457200"/>
+          </a:xfrm>
+          <a:prstGeom prst="rect">
+            <a:avLst/>
+          </a:prstGeom>
+          <a:solidFill>
+            <a:srgbClr val="C4421D"/>
+          </a:solidFill>
+          <a:ln w="9525">
+            <a:solidFill>
+              <a:srgbClr val="E3E3E3"/>
+            </a:solidFill>
+            <a:prstDash val="solid"/>
+          </a:ln>
+        </p:spPr>
+      </p:sp>
+      <p:sp>
+        <p:nvSpPr>
+          <p:cNvPr id="12" name="Text 10"/>
+          <p:cNvSpPr txBox="1"/>
+          <p:nvPr/>
+        </p:nvSpPr>
+        <p:spPr>
+          <a:xfrm>
+            <a:off x="6446520" y="2660904"/>
+            <a:ext cx="2103120" cy="274320"/>
+          </a:xfrm>
+          <a:prstGeom prst="rect">
+            <a:avLst/>
+          </a:prstGeom>
+          <a:noFill/>
+          <a:ln/>
+        </p:spPr>
+        <p:txBody>
+          <a:bodyPr wrap="square" lIns="0" tIns="0" rIns="0" bIns="0" rtlCol="0" anchor="t"/>
+          <a:lstStyle/>
+          <a:p>
+            <a:pPr indent="0" marL="0">
+              <a:buNone/>
+            </a:pPr>
+            <a:r>
+              <a:rPr lang="en-US" sz="1200" dirty="0">
+                <a:solidFill>
+                  <a:srgbClr val="1A1A1A"/>
+                </a:solidFill>
+                <a:latin typeface="Jost" pitchFamily="34" charset="0"/>
+                <a:ea typeface="Jost" pitchFamily="34" charset="-122"/>
+                <a:cs typeface="Jost" pitchFamily="34" charset="-120"/>
+              </a:rPr>
+              <a:t>accent text  #C4421D</a:t>
+            </a:r>
+            <a:endParaRPr lang="en-US" sz="1200" dirty="0"/>
+          </a:p>
+        </p:txBody>
+      </p:sp>
+      <p:sp>
+        <p:nvSpPr>
+          <p:cNvPr id="13" name="Shape 11"/>
+          <p:cNvSpPr/>
+          <p:nvPr/>
+        </p:nvSpPr>
+        <p:spPr>
+          <a:xfrm>
+            <a:off x="5852160" y="3191256"/>
+            <a:ext cx="457200" cy="457200"/>
+          </a:xfrm>
+          <a:prstGeom prst="rect">
+            <a:avLst/>
+          </a:prstGeom>
+          <a:solidFill>
+            <a:srgbClr val="6B6B6B"/>
+          </a:solidFill>
+          <a:ln w="9525">
+            <a:solidFill>
+              <a:srgbClr val="E3E3E3"/>
+            </a:solidFill>
+            <a:prstDash val="solid"/>
+          </a:ln>
+        </p:spPr>
+      </p:sp>
+      <p:sp>
+        <p:nvSpPr>
+          <p:cNvPr id="14" name="Text 12"/>
+          <p:cNvSpPr txBox="1"/>
+          <p:nvPr/>
+        </p:nvSpPr>
+        <p:spPr>
+          <a:xfrm>
+            <a:off x="6446520" y="3282696"/>
+            <a:ext cx="2103120" cy="274320"/>
+          </a:xfrm>
+          <a:prstGeom prst="rect">
+            <a:avLst/>
+          </a:prstGeom>
+          <a:noFill/>
+          <a:ln/>
+        </p:spPr>
+        <p:txBody>
+          <a:bodyPr wrap="square" lIns="0" tIns="0" rIns="0" bIns="0" rtlCol="0" anchor="t"/>
+          <a:lstStyle/>
+          <a:p>
+            <a:pPr indent="0" marL="0">
+              <a:buNone/>
+            </a:pPr>
+            <a:r>
+              <a:rPr lang="en-US" sz="1200" dirty="0">
+                <a:solidFill>
+                  <a:srgbClr val="1A1A1A"/>
+                </a:solidFill>
+                <a:latin typeface="Jost" pitchFamily="34" charset="0"/>
+                <a:ea typeface="Jost" pitchFamily="34" charset="-122"/>
+                <a:cs typeface="Jost" pitchFamily="34" charset="-120"/>
+              </a:rPr>
+              <a:t>muted  #6B6B6B</a:t>
+            </a:r>
+            <a:endParaRPr lang="en-US" sz="1200" dirty="0"/>
+          </a:p>
+        </p:txBody>
+      </p:sp>
+      <p:sp>
+        <p:nvSpPr>
+          <p:cNvPr id="15" name="Shape 13"/>
+          <p:cNvSpPr/>
+          <p:nvPr/>
+        </p:nvSpPr>
+        <p:spPr>
+          <a:xfrm>
+            <a:off x="5852160" y="3813048"/>
+            <a:ext cx="457200" cy="457200"/>
+          </a:xfrm>
+          <a:prstGeom prst="rect">
+            <a:avLst/>
+          </a:prstGeom>
+          <a:solidFill>
+            <a:srgbClr val="E3E3E3"/>
+          </a:solidFill>
+          <a:ln w="9525">
+            <a:solidFill>
+              <a:srgbClr val="E3E3E3"/>
+            </a:solidFill>
+            <a:prstDash val="solid"/>
+          </a:ln>
+        </p:spPr>
+      </p:sp>
+      <p:sp>
+        <p:nvSpPr>
+          <p:cNvPr id="16" name="Text 14"/>
+          <p:cNvSpPr txBox="1"/>
+          <p:nvPr/>
+        </p:nvSpPr>
+        <p:spPr>
+          <a:xfrm>
+            <a:off x="6446520" y="3904488"/>
+            <a:ext cx="2103120" cy="274320"/>
+          </a:xfrm>
+          <a:prstGeom prst="rect">
+            <a:avLst/>
+          </a:prstGeom>
+          <a:noFill/>
+          <a:ln/>
+        </p:spPr>
+        <p:txBody>
+          <a:bodyPr wrap="square" lIns="0" tIns="0" rIns="0" bIns="0" rtlCol="0" anchor="t"/>
+          <a:lstStyle/>
+          <a:p>
+            <a:pPr indent="0" marL="0">
+              <a:buNone/>
+            </a:pPr>
+            <a:r>
+              <a:rPr lang="en-US" sz="1200" dirty="0">
+                <a:solidFill>
+                  <a:srgbClr val="1A1A1A"/>
+                </a:solidFill>
+                <a:latin typeface="Jost" pitchFamily="34" charset="0"/>
+                <a:ea typeface="Jost" pitchFamily="34" charset="-122"/>
+                <a:cs typeface="Jost" pitchFamily="34" charset="-120"/>
+              </a:rPr>
+              <a:t>line  #E3E3E3</a:t>
+            </a:r>
+            <a:endParaRPr lang="en-US" sz="1200" dirty="0"/>
+          </a:p>
+        </p:txBody>
+      </p:sp>
+      <p:sp>
+        <p:nvSpPr>
+          <p:cNvPr id="17" name="Text 0"/>
+          <p:cNvSpPr/>
+          <p:nvPr>
+            <p:ph idx="101" type="body" hasCustomPrompt="1"/>
+          </p:nvPr>
+        </p:nvSpPr>
+        <p:spPr>
+          <a:xfrm>
+            <a:off x="548640" y="1371600"/>
+            <a:ext cx="8046720" cy="3108960"/>
+          </a:xfrm>
+          <a:prstGeom prst="rect">
+            <a:avLst/>
+          </a:prstGeom>
+          <a:noFill/>
+          <a:ln/>
+        </p:spPr>
+        <p:txBody>
+          <a:bodyPr wrap="square" lIns="0" tIns="0" rIns="0" bIns="0" rtlCol="0" anchor="t"/>
+          <a:lstStyle/>
+          <a:p>
+            <a:pPr indent="0" marL="0">
+              <a:buNone/>
+            </a:pPr>
+            <a:endParaRPr lang="en-US" sz="1600" dirty="0"/>
+          </a:p>
+        </p:txBody>
+      </p:sp>
+      <p:sp>
+        <p:nvSpPr>
+          <p:cNvPr id="25" name="Slide Number Placeholder 0"/>
+          <p:cNvSpPr>
+            <a:spLocks noGrp="1"/>
+          </p:cNvSpPr>
+          <p:nvPr>
+            <p:ph type="sldNum" sz="quarter" idx="4294967295"/>
+          </p:nvPr>
+        </p:nvSpPr>
+        <p:spPr>
+          <a:xfrm>
+            <a:off x="8229600" y="4663440"/>
+            <a:ext cx="365760" cy="274320"/>
+          </a:xfrm>
+          <a:prstGeom prst="rect">
+            <a:avLst/>
+          </a:prstGeom>
+          <a:extLst>
+            <a:ext uri="{C572A759-6A51-4108-AA02-DFA0A04FC94B}">
+              <ma14:wrappingTextBoxFlag xmlns:ma14="http://schemas.microsoft.com/office/mac/drawingml/2011/main" val="0"/>
+            </a:ext>
+          </a:extLst>
+        </p:spPr>
+        <p:txBody>
+          <a:bodyPr/>
+          <a:lstStyle>
+            <a:lvl1pPr>
+              <a:defRPr sz="900">
+                <a:solidFill>
+                  <a:srgbClr val="6B6B6B"/>
+                </a:solidFill>
+                <a:latin typeface="Jost"/>
+                <a:ea typeface="Jost"/>
+                <a:cs typeface="Jost"/>
+              </a:defRPr>
+            </a:lvl1pPr>
+          </a:lstStyle>
+          <a:p>
+            <a:pPr algn="r"/>
+            <a:fld id="{F7021451-1387-4CA6-816F-3879F97B5CBC}" type="slidenum">
+              <a:rPr b="0" lang="en-US"/>
+              <a:t>7</a:t>
+            </a:fld>
+            <a:endParaRPr lang="en-US"/>
+          </a:p>
+        </p:txBody>
+      </p:sp>
+    </p:spTree>
+  </p:cSld>
+  <p:clrMapOvr>
+    <a:masterClrMapping/>
+  </p:clrMapOvr>
+</p:sld>
+</file>
+
+<file path=ppt/slides/slide8.xml><?xml version="1.0" encoding="utf-8"?>
+<p:sld xmlns:a="http://schemas.openxmlformats.org/drawingml/2006/main" xmlns:r="http://schemas.openxmlformats.org/officeDocument/2006/relationships" xmlns:p="http://schemas.openxmlformats.org/presentationml/2006/main">
+  <p:cSld name="Slide 8">
     <p:spTree>
       <p:nvGrpSpPr>
         <p:cNvPr id="1" name=""/>

--- a/brand/templates/brand-slides-template.pptx
+++ b/brand/templates/brand-slides-template.pptx
@@ -1618,65 +1618,30 @@
           </a:p>
         </p:txBody>
       </p:sp>
-      <p:sp>
-        <p:nvSpPr>
-          <p:cNvPr id="4" name="Shape 0"/>
-          <p:cNvSpPr/>
+      <p:pic>
+        <p:nvPicPr>
+          <p:cNvPr id="4" name="Image 0" descr="/home/user/test/brand/templates/../logo/xlrte-white.png">    </p:cNvPr>
+          <p:cNvPicPr>
+            <a:picLocks noChangeAspect="1"/>
+          </p:cNvPicPr>
           <p:nvPr/>
-        </p:nvSpPr>
-        <p:spPr>
-          <a:xfrm>
-            <a:off x="548640" y="1097280"/>
-            <a:ext cx="256032" cy="256032"/>
-          </a:xfrm>
-          <a:prstGeom prst="rect">
-            <a:avLst/>
-          </a:prstGeom>
-          <a:solidFill>
-            <a:srgbClr val="E4572E"/>
-          </a:solidFill>
-          <a:ln/>
-        </p:spPr>
-      </p:sp>
-      <p:sp>
-        <p:nvSpPr>
-          <p:cNvPr id="5" name="Text 1"/>
-          <p:cNvSpPr/>
-          <p:nvPr/>
-        </p:nvSpPr>
-        <p:spPr>
-          <a:xfrm>
-            <a:off x="548640" y="4663440"/>
-            <a:ext cx="2743200" cy="274320"/>
-          </a:xfrm>
-          <a:prstGeom prst="rect">
-            <a:avLst/>
-          </a:prstGeom>
-          <a:noFill/>
-          <a:ln/>
-        </p:spPr>
-        <p:txBody>
-          <a:bodyPr wrap="square" lIns="0" tIns="0" rIns="0" bIns="0" rtlCol="0" anchor="ctr"/>
-          <a:lstStyle/>
-          <a:p>
-            <a:pPr indent="0" marL="0">
-              <a:buNone/>
-            </a:pPr>
-            <a:r>
-              <a:rPr lang="en-US" sz="900" spc="200" kern="0" dirty="0">
-                <a:solidFill>
-                  <a:srgbClr val="8A8A8A"/>
-                </a:solidFill>
-                <a:latin typeface="Jost" pitchFamily="34" charset="0"/>
-                <a:ea typeface="Jost" pitchFamily="34" charset="-122"/>
-                <a:cs typeface="Jost" pitchFamily="34" charset="-120"/>
-              </a:rPr>
-              <a:t>BRAND · v0.3</a:t>
-            </a:r>
-            <a:endParaRPr lang="en-US" sz="900" dirty="0"/>
-          </a:p>
-        </p:txBody>
-      </p:sp>
+        </p:nvPicPr>
+        <p:blipFill>
+          <a:blip r:embed="rId1"/>
+          <a:stretch>
+            <a:fillRect/>
+          </a:stretch>
+        </p:blipFill>
+        <p:spPr>
+          <a:xfrm>
+            <a:off x="548640" y="548640"/>
+            <a:ext cx="1172032" cy="274320"/>
+          </a:xfrm>
+          <a:prstGeom prst="rect">
+            <a:avLst/>
+          </a:prstGeom>
+        </p:spPr>
+      </p:pic>
     </p:spTree>
   </p:cSld>
   <p:clrMapOvr>
@@ -1793,45 +1758,30 @@
           </a:p>
         </p:txBody>
       </p:sp>
-      <p:sp>
-        <p:nvSpPr>
-          <p:cNvPr id="4" name="Text 0"/>
-          <p:cNvSpPr/>
+      <p:pic>
+        <p:nvPicPr>
+          <p:cNvPr id="4" name="Image 0" descr="/home/user/test/brand/templates/../logo/xlrte-black.png">    </p:cNvPr>
+          <p:cNvPicPr>
+            <a:picLocks noChangeAspect="1"/>
+          </p:cNvPicPr>
           <p:nvPr/>
-        </p:nvSpPr>
-        <p:spPr>
-          <a:xfrm>
-            <a:off x="548640" y="4663440"/>
-            <a:ext cx="2743200" cy="274320"/>
-          </a:xfrm>
-          <a:prstGeom prst="rect">
-            <a:avLst/>
-          </a:prstGeom>
-          <a:noFill/>
-          <a:ln/>
-        </p:spPr>
-        <p:txBody>
-          <a:bodyPr wrap="square" lIns="0" tIns="0" rIns="0" bIns="0" rtlCol="0" anchor="ctr"/>
-          <a:lstStyle/>
-          <a:p>
-            <a:pPr indent="0" marL="0">
-              <a:buNone/>
-            </a:pPr>
-            <a:r>
-              <a:rPr lang="en-US" sz="900" spc="200" kern="0" dirty="0">
-                <a:solidFill>
-                  <a:srgbClr val="1A1A1A"/>
-                </a:solidFill>
-                <a:latin typeface="Jost" pitchFamily="34" charset="0"/>
-                <a:ea typeface="Jost" pitchFamily="34" charset="-122"/>
-                <a:cs typeface="Jost" pitchFamily="34" charset="-120"/>
-              </a:rPr>
-              <a:t>BRAND · v0.3</a:t>
-            </a:r>
-            <a:endParaRPr lang="en-US" sz="900" dirty="0"/>
-          </a:p>
-        </p:txBody>
-      </p:sp>
+        </p:nvPicPr>
+        <p:blipFill>
+          <a:blip r:embed="rId1"/>
+          <a:stretch>
+            <a:fillRect/>
+          </a:stretch>
+        </p:blipFill>
+        <p:spPr>
+          <a:xfrm>
+            <a:off x="548640" y="4681728"/>
+            <a:ext cx="546948" cy="128016"/>
+          </a:xfrm>
+          <a:prstGeom prst="rect">
+            <a:avLst/>
+          </a:prstGeom>
+        </p:spPr>
+      </p:pic>
     </p:spTree>
   </p:cSld>
   <p:clrMapOvr>
@@ -1948,45 +1898,30 @@
           </a:p>
         </p:txBody>
       </p:sp>
-      <p:sp>
-        <p:nvSpPr>
-          <p:cNvPr id="4" name="Text 0"/>
-          <p:cNvSpPr/>
+      <p:pic>
+        <p:nvPicPr>
+          <p:cNvPr id="4" name="Image 0" descr="/home/user/test/brand/templates/../logo/xlrte-color.png">    </p:cNvPr>
+          <p:cNvPicPr>
+            <a:picLocks noChangeAspect="1"/>
+          </p:cNvPicPr>
           <p:nvPr/>
-        </p:nvSpPr>
-        <p:spPr>
-          <a:xfrm>
-            <a:off x="548640" y="4663440"/>
-            <a:ext cx="2743200" cy="274320"/>
-          </a:xfrm>
-          <a:prstGeom prst="rect">
-            <a:avLst/>
-          </a:prstGeom>
-          <a:noFill/>
-          <a:ln/>
-        </p:spPr>
-        <p:txBody>
-          <a:bodyPr wrap="square" lIns="0" tIns="0" rIns="0" bIns="0" rtlCol="0" anchor="ctr"/>
-          <a:lstStyle/>
-          <a:p>
-            <a:pPr indent="0" marL="0">
-              <a:buNone/>
-            </a:pPr>
-            <a:r>
-              <a:rPr lang="en-US" sz="900" spc="200" kern="0" dirty="0">
-                <a:solidFill>
-                  <a:srgbClr val="6B6B6B"/>
-                </a:solidFill>
-                <a:latin typeface="Jost" pitchFamily="34" charset="0"/>
-                <a:ea typeface="Jost" pitchFamily="34" charset="-122"/>
-                <a:cs typeface="Jost" pitchFamily="34" charset="-120"/>
-              </a:rPr>
-              <a:t>BRAND · v0.3</a:t>
-            </a:r>
-            <a:endParaRPr lang="en-US" sz="900" dirty="0"/>
-          </a:p>
-        </p:txBody>
-      </p:sp>
+        </p:nvPicPr>
+        <p:blipFill>
+          <a:blip r:embed="rId1"/>
+          <a:stretch>
+            <a:fillRect/>
+          </a:stretch>
+        </p:blipFill>
+        <p:spPr>
+          <a:xfrm>
+            <a:off x="548640" y="4681728"/>
+            <a:ext cx="546948" cy="128016"/>
+          </a:xfrm>
+          <a:prstGeom prst="rect">
+            <a:avLst/>
+          </a:prstGeom>
+        </p:spPr>
+      </p:pic>
       <p:sp>
         <p:nvSpPr>
           <p:cNvPr id="25" name="Slide Number Placeholder 0"/>
@@ -5139,6 +5074,30 @@
           </a:p>
         </p:txBody>
       </p:sp>
+      <p:pic>
+        <p:nvPicPr>
+          <p:cNvPr id="4" name="Image 0" descr="P·E">    </p:cNvPr>
+          <p:cNvPicPr>
+            <a:picLocks noChangeAspect="1"/>
+          </p:cNvPicPr>
+          <p:nvPr/>
+        </p:nvPicPr>
+        <p:blipFill>
+          <a:blip r:embed="rId1"/>
+          <a:stretch>
+            <a:fillRect/>
+          </a:stretch>
+        </p:blipFill>
+        <p:spPr>
+          <a:xfrm>
+            <a:off x="8240116" y="4526280"/>
+            <a:ext cx="355244" cy="274320"/>
+          </a:xfrm>
+          <a:prstGeom prst="rect">
+            <a:avLst/>
+          </a:prstGeom>
+        </p:spPr>
+      </p:pic>
     </p:spTree>
   </p:cSld>
   <p:clrMapOvr>

--- a/brand/templates/brand-slides-template.pptx
+++ b/brand/templates/brand-slides-template.pptx
@@ -1620,7 +1620,7 @@
       </p:sp>
       <p:pic>
         <p:nvPicPr>
-          <p:cNvPr id="4" name="Image 0" descr="/home/user/test/brand/templates/../logo/xlrte-white.png">    </p:cNvPr>
+          <p:cNvPr id="4" name="Image 0" descr="/home/runner/work/test/test/brand/templates/../logo/xlrte-white.png">    </p:cNvPr>
           <p:cNvPicPr>
             <a:picLocks noChangeAspect="1"/>
           </p:cNvPicPr>
@@ -1760,7 +1760,7 @@
       </p:sp>
       <p:pic>
         <p:nvPicPr>
-          <p:cNvPr id="4" name="Image 0" descr="/home/user/test/brand/templates/../logo/xlrte-black.png">    </p:cNvPr>
+          <p:cNvPr id="4" name="Image 0" descr="/home/runner/work/test/test/brand/templates/../logo/xlrte-black.png">    </p:cNvPr>
           <p:cNvPicPr>
             <a:picLocks noChangeAspect="1"/>
           </p:cNvPicPr>
@@ -1900,7 +1900,7 @@
       </p:sp>
       <p:pic>
         <p:nvPicPr>
-          <p:cNvPr id="4" name="Image 0" descr="/home/user/test/brand/templates/../logo/xlrte-color.png">    </p:cNvPr>
+          <p:cNvPr id="4" name="Image 0" descr="/home/runner/work/test/test/brand/templates/../logo/xlrte-color.png">    </p:cNvPr>
           <p:cNvPicPr>
             <a:picLocks noChangeAspect="1"/>
           </p:cNvPicPr>

--- a/brand/templates/brand-slides-template.pptx
+++ b/brand/templates/brand-slides-template.pptx
@@ -1620,7 +1620,7 @@
       </p:sp>
       <p:pic>
         <p:nvPicPr>
-          <p:cNvPr id="4" name="Image 0" descr="/home/runner/work/test/test/brand/templates/../logo/xlrte-white.png">    </p:cNvPr>
+          <p:cNvPr id="4" name="Image 0" descr="/home/user/test/brand/templates/../logo/xlrte-white.png">    </p:cNvPr>
           <p:cNvPicPr>
             <a:picLocks noChangeAspect="1"/>
           </p:cNvPicPr>
@@ -1760,7 +1760,7 @@
       </p:sp>
       <p:pic>
         <p:nvPicPr>
-          <p:cNvPr id="4" name="Image 0" descr="/home/runner/work/test/test/brand/templates/../logo/xlrte-black.png">    </p:cNvPr>
+          <p:cNvPr id="4" name="Image 0" descr="/home/user/test/brand/templates/../logo/xlrte-black.png">    </p:cNvPr>
           <p:cNvPicPr>
             <a:picLocks noChangeAspect="1"/>
           </p:cNvPicPr>
@@ -1900,7 +1900,7 @@
       </p:sp>
       <p:pic>
         <p:nvPicPr>
-          <p:cNvPr id="4" name="Image 0" descr="/home/runner/work/test/test/brand/templates/../logo/xlrte-color.png">    </p:cNvPr>
+          <p:cNvPr id="4" name="Image 0" descr="/home/user/test/brand/templates/../logo/xlrte-color.png">    </p:cNvPr>
           <p:cNvPicPr>
             <a:picLocks noChangeAspect="1"/>
           </p:cNvPicPr>

--- a/brand/templates/brand-slides-template.pptx
+++ b/brand/templates/brand-slides-template.pptx
@@ -1620,7 +1620,7 @@
       </p:sp>
       <p:pic>
         <p:nvPicPr>
-          <p:cNvPr id="4" name="Image 0" descr="/home/user/test/brand/templates/../logo/xlrte-white.png">    </p:cNvPr>
+          <p:cNvPr id="4" name="Image 0" descr="XLRTE">    </p:cNvPr>
           <p:cNvPicPr>
             <a:picLocks noChangeAspect="1"/>
           </p:cNvPicPr>
@@ -1760,7 +1760,7 @@
       </p:sp>
       <p:pic>
         <p:nvPicPr>
-          <p:cNvPr id="4" name="Image 0" descr="/home/user/test/brand/templates/../logo/xlrte-black.png">    </p:cNvPr>
+          <p:cNvPr id="4" name="Image 0" descr="XLRTE">    </p:cNvPr>
           <p:cNvPicPr>
             <a:picLocks noChangeAspect="1"/>
           </p:cNvPicPr>
@@ -1900,7 +1900,7 @@
       </p:sp>
       <p:pic>
         <p:nvPicPr>
-          <p:cNvPr id="4" name="Image 0" descr="/home/user/test/brand/templates/../logo/xlrte-color.png">    </p:cNvPr>
+          <p:cNvPr id="4" name="Image 0" descr="XLRTE">    </p:cNvPr>
           <p:cNvPicPr>
             <a:picLocks noChangeAspect="1"/>
           </p:cNvPicPr>
